--- a/oc2026_slides/01_学科紹介_8月23日OC_鈴木版_改.pptx
+++ b/oc2026_slides/01_学科紹介_8月23日OC_鈴木版_改.pptx
@@ -548,6 +548,16 @@
           </a:p>
           <a:p>
             <a:r>
+              <a:t>※14枚目で「これが9人です」と答え合わせをします。人物が写っていない写真を使う場合は、</a:t>
+            </a:r>
+          </a:p>
+          <a:p>
+            <a:r>
+              <a:t>　14枚目のセリフを「表紙でお見せした写真、覚えていますか。そこへ行ったのがこの9人です」に変えてください。</a:t>
+            </a:r>
+          </a:p>
+          <a:p>
+            <a:r>
               <a:t>——ここで種を蒔いておくと、14枚目の答え合わせで空気が変わります。必ず言ってください。</a:t>
             </a:r>
           </a:p>
@@ -735,17 +745,22 @@
           <a:p/>
           <a:p>
             <a:r>
-              <a:t>1年生：まだ海外には行きません。検定を受けます。その受験料を大学が出します。3万円、全員対象。</a:t>
-            </a:r>
-          </a:p>
-          <a:p>
-            <a:r>
-              <a:t>2年生：5週間、オーストラリアかニュージーランドへ。研修費30万円。</a:t>
-            </a:r>
-          </a:p>
-          <a:p>
-            <a:r>
-              <a:t>3年生：半年から1年の留学。最大62万円。</a:t>
+              <a:t>1年生：Big Jump の派遣はまだありません。まず検定を受けます。その受験料を大学が出します。3万円。</a:t>
+            </a:r>
+          </a:p>
+          <a:p>
+            <a:r>
+              <a:t>　　　（1年次から参加できるバリ島研修は別にあります。聞かれたら答えてください。）</a:t>
+            </a:r>
+          </a:p>
+          <a:p>
+            <a:r>
+              <a:t>2年生：5週間、オーストラリアかニュージーランドへ。研修費30万円。ただしこれは選抜で、10名程度です。</a:t>
+            </a:r>
+          </a:p>
+          <a:p>
+            <a:r>
+              <a:t>3年生：半年から1年の留学。最大62万円。こちらも選抜で10名程度です。条件は16枚目で正直に話します。</a:t>
             </a:r>
           </a:p>
           <a:p>
@@ -767,12 +782,12 @@
           </a:p>
           <a:p>
             <a:r>
-              <a:t>このあとの1年生〜4年生の詳細4枚（12・13・15・17枚目）は、この1枚に集約されています。</a:t>
-            </a:r>
-          </a:p>
-          <a:p>
-            <a:r>
-              <a:t>押しているなら、この1枚を見せたあと16枚目「お金の話」へ飛んでも、話は成立します。</a:t>
+              <a:t>押しているなら、12・13・15を飛ばして 11 →（14枚目の写真）→ 16枚目「お金の話」とつないでください。</a:t>
+            </a:r>
+          </a:p>
+          <a:p>
+            <a:r>
+              <a:t>**14枚目だけは、何があっても飛ばさないこと。** 表紙で約束した写真の答え合わせが、そこにしかありません。</a:t>
             </a:r>
           </a:p>
         </p:txBody>
@@ -853,6 +868,17 @@
           <a:p/>
           <a:p>
             <a:r>
+              <a:t>※「1年生は海外に行かない」とは言わないこと。1年次から参加できるバリ島研修が別にあります。</a:t>
+            </a:r>
+          </a:p>
+          <a:p>
+            <a:r>
+              <a:t>　ここで話しているのは Big Jump の派遣のことです。聞かれたら「バリ島研修は1年生から行けます」と答えてください。</a:t>
+            </a:r>
+          </a:p>
+          <a:p/>
+          <a:p>
+            <a:r>
               <a:t>そのうえで一言添えます。「英語が得意でなくても、まず受けてみるところから始められます。」</a:t>
             </a:r>
           </a:p>
@@ -961,12 +987,12 @@
           <a:p/>
           <a:p>
             <a:r>
-              <a:t>保護者は「知らない家に泊まる」ところが気になります。ホームステイ先は大学が手配していること、</a:t>
-            </a:r>
-          </a:p>
-          <a:p>
-            <a:r>
-              <a:t>海外経験の豊富な教員がついていることを口頭で添えてください。</a:t>
+              <a:t>保護者は「知らない家に泊まる」ところが気になります。ただし**手配の方法や引率体制は、この場で断定しないこと。**</a:t>
+            </a:r>
+          </a:p>
+          <a:p>
+            <a:r>
+              <a:t>聞かれたら「受入体制は大学が整えています。手配や引率の具体的なところは、このあと担当から正確にお答えします」と返してください。</a:t>
             </a:r>
           </a:p>
           <a:p>
@@ -1057,6 +1083,11 @@
           <a:p/>
           <a:p>
             <a:r>
+              <a:t>訪問したのはオークランド・ウェリントン・クライストチャーチの3都市です（口頭で補ってください）。</a:t>
+            </a:r>
+          </a:p>
+          <a:p>
+            <a:r>
               <a:t>写真はキウイフルーツ農園への企業訪問です。締めのひとこと：</a:t>
             </a:r>
           </a:p>
@@ -1172,6 +1203,17 @@
               <a:t>ここは保護者席のほうを向いて言ってください。</a:t>
             </a:r>
           </a:p>
+          <a:p/>
+          <a:p>
+            <a:r>
+              <a:t>※「授業料半額」は今日2回出てきます。ここは**留学に行っている期間の分**、24枚目は**入試の優遇**で、別の制度です。</a:t>
+            </a:r>
+          </a:p>
+          <a:p>
+            <a:r>
+              <a:t>　併用できるかは未確認。聞かれたら「別々の制度です。併用できるかは要項で確認してお答えします」と返し、断定しないこと。</a:t>
+            </a:r>
+          </a:p>
         </p:txBody>
       </p:sp>
       <p:sp>
@@ -1239,34 +1281,55 @@
           <a:lstStyle/>
           <a:p>
             <a:r>
-              <a:t>【誠実さで信用を取る1枚／100秒】</a:t>
-            </a:r>
-          </a:p>
-          <a:p>
-            <a:r>
-              <a:t>「お金の話を、正直にします」と前置きしてから、95万円を出してください。</a:t>
+              <a:t>【誠実さで信用を取る1枚／100秒・今日の山場】</a:t>
             </a:r>
           </a:p>
           <a:p/>
           <a:p>
             <a:r>
-              <a:t>そのうえで、すぐに条件を言います。</a:t>
-            </a:r>
-          </a:p>
-          <a:p>
-            <a:r>
-              <a:t>「3万円は全員。30万円と62万円は選抜で、それぞれ10名程度です。」</a:t>
+              <a:t>【伏線回収・いちばん最初に必ず言う】</a:t>
+            </a:r>
+          </a:p>
+          <a:p>
+            <a:r>
+              <a:t>「最初に、今日は数字を1つだけ覚えて帰ってくださいと言いました。その数字が、これです。」</a:t>
+            </a:r>
+          </a:p>
+          <a:p>
+            <a:r>
+              <a:t>——そう言ってから95万円を出す。**出したあと3秒黙る**（沈黙を置く3か所のひとつ）。</a:t>
             </a:r>
           </a:p>
           <a:p/>
           <a:p>
             <a:r>
-              <a:t>ただし、と続けます。「1学年40人の学科です。10名程度というのは、決して狭き門ではありません。」</a:t>
-            </a:r>
-          </a:p>
-          <a:p>
-            <a:r>
-              <a:t>——この一言は必ず添えてください。落とすためではなく、届く距離だと伝えるためのスライドです。</a:t>
+              <a:t>そのうえで「お金の話を、正直にします」と前置きし、すぐに条件を言います。</a:t>
+            </a:r>
+          </a:p>
+          <a:p>
+            <a:r>
+              <a:t>「3万円は全員が対象の制度です。30万円と62万円は選抜で、それぞれ10名程度です。」</a:t>
+            </a:r>
+          </a:p>
+          <a:p/>
+          <a:p>
+            <a:r>
+              <a:t>続けて規模感だけを言います。</a:t>
+            </a:r>
+          </a:p>
+          <a:p>
+            <a:r>
+              <a:t>「1学年40人の学科に対して、枠がそれぞれ10名程度ある、という規模です。」</a:t>
+            </a:r>
+          </a:p>
+          <a:p>
+            <a:r>
+              <a:t>——**「決して狭き門ではありません」「ほぼ全員行けます」とは言わないこと。**倍率も選抜基準も未確認です。</a:t>
+            </a:r>
+          </a:p>
+          <a:p>
+            <a:r>
+              <a:t>　倍率を聞かれたら「年度で変わるので、要項で確認してお返しします」。</a:t>
             </a:r>
           </a:p>
           <a:p/>
@@ -1364,7 +1427,7 @@
           <a:p/>
           <a:p>
             <a:r>
-              <a:t>「卒業論文を英語で書くゼミがある」は他学科にない特徴なので、一言添えてください。</a:t>
+              <a:t>「卒業論文を英語で書くゼミもあります」と、事実だけを一言添えてください。他学科との比較は口にしないこと。</a:t>
             </a:r>
           </a:p>
           <a:p>
@@ -1444,6 +1507,17 @@
           </a:p>
           <a:p>
             <a:r>
+              <a:t>（2枚目で「英語が話せるようになりたい」系の答えが出ていれば、</a:t>
+            </a:r>
+          </a:p>
+          <a:p>
+            <a:r>
+              <a:t>　「さっき○○と言ってくれた方」と拾ってから本文に入る。出ていなければそのまま本文へ）</a:t>
+            </a:r>
+          </a:p>
+          <a:p/>
+          <a:p>
+            <a:r>
               <a:t>ゆっくり話してください。</a:t>
             </a:r>
           </a:p>
@@ -1692,12 +1766,17 @@
           <a:p/>
           <a:p>
             <a:r>
-              <a:t>余裕があれば「今日ここに来た理由」も一言ずつ拾ってください。</a:t>
-            </a:r>
-          </a:p>
-          <a:p>
-            <a:r>
-              <a:t>拾った言葉は、後半の該当スライドで「さっき○○と言ってくれた方」と呼び戻すと効きます。</a:t>
+              <a:t>余裕があれば「今日ここに来た理由」も拾ってください。ただし**拾うのは2〜3人まで**。</a:t>
+            </a:r>
+          </a:p>
+          <a:p>
+            <a:r>
+              <a:t>全員に振ると冒頭で簡単に1分超過します。時間がなければ拾わなくて構いません。</a:t>
+            </a:r>
+          </a:p>
+          <a:p>
+            <a:r>
+              <a:t>拾った言葉を使うのは18枚目（英語が苦手でも大丈夫）です。使い先はそこ1枚に固定してあります。</a:t>
             </a:r>
           </a:p>
         </p:txBody>
@@ -1874,12 +1953,22 @@
           <a:p/>
           <a:p>
             <a:r>
-              <a:t>あわせて口頭で補足（スライドには載せていません）：</a:t>
-            </a:r>
-          </a:p>
-          <a:p>
-            <a:r>
-              <a:t>外国語の運用能力、チャレンジ精神・意欲、外国語の授業への満足度も学部トップでした。</a:t>
+              <a:t>あわせて口頭で補足（スライドには載せていません）。**限定を落とさないこと。**</a:t>
+            </a:r>
+          </a:p>
+          <a:p>
+            <a:r>
+              <a:t>「外国語の運用能力と、外国語の授業への満足度についても、卒業生の自己評価は経済学部でいちばん高い結果でした。</a:t>
+            </a:r>
+          </a:p>
+          <a:p>
+            <a:r>
+              <a:t>　チャレンジ精神・意欲は、学部内で伸びがいちばん大きい結果でした。」</a:t>
+            </a:r>
+          </a:p>
+          <a:p>
+            <a:r>
+              <a:t>——「自己評価のアンケートです」と一言添えてください。実測した語学力ではありません。</a:t>
             </a:r>
           </a:p>
           <a:p/>
@@ -2078,6 +2167,22 @@
           <a:p/>
           <a:p>
             <a:r>
+              <a:t>※パネルの「全員」は、制度の対象範囲のことです。支給には条件（英検準2級レベルの取得など）があります。</a:t>
+            </a:r>
+          </a:p>
+          <a:p>
+            <a:r>
+              <a:t>　自分から長く説明する必要はありませんが、聞かれたら</a:t>
+            </a:r>
+          </a:p>
+          <a:p>
+            <a:r>
+              <a:t>　「学科の全員が対象の制度ですが、支給には条件があります。正確な条件は最新の募集要項で」と返してください。</a:t>
+            </a:r>
+          </a:p>
+          <a:p/>
+          <a:p>
+            <a:r>
               <a:t>【削る優先度：1番目】次のスライドで同じ数字がもう一度出るので、押していれば飛ばせます。</a:t>
             </a:r>
           </a:p>
@@ -2153,23 +2258,38 @@
           </a:p>
           <a:p>
             <a:r>
-              <a:t>目の前の生徒に引きつけて言ってください。</a:t>
-            </a:r>
-          </a:p>
-          <a:p>
-            <a:r>
-              <a:t>「いま3年生で英検準2級を持っている人は、もうこの入試の出願資格があります。」</a:t>
+              <a:t>目の前の生徒に引きつけて、ただし**言い切らないこと。**</a:t>
+            </a:r>
+          </a:p>
+          <a:p>
+            <a:r>
+              <a:t>「いま英検準2級を持っている人は、語学の条件はもう満たしています。」——ここで2秒黙る。</a:t>
+            </a:r>
+          </a:p>
+          <a:p>
+            <a:r>
+              <a:t>「あとは、みなさんの高校が対象校かどうかです。そこは必ず要項と、高校の先生に確認してください。」</a:t>
+            </a:r>
+          </a:p>
+          <a:p>
+            <a:r>
+              <a:t>※指定校推薦なので「もう出願資格があります」「受けられます」は禁句です。</a:t>
+            </a:r>
+          </a:p>
+          <a:p>
+            <a:r>
+              <a:t>　今日は対象校でない高校の生徒・保護者も来ています。</a:t>
             </a:r>
           </a:p>
           <a:p/>
           <a:p>
             <a:r>
-              <a:t>そのうえで保護者へ（スライドには書いていません、口頭で）。</a:t>
-            </a:r>
-          </a:p>
-          <a:p>
-            <a:r>
-              <a:t>「浮いたお金を、留学や海外研修に回せます。自宅から通えば、下宿代もかかりません。都市部で一人暮らし＋授業料全額と比べると、差は相当大きくなります。</a:t>
+              <a:t>そのうえで保護者へ（スライドには書いていません、口頭で1回だけ）。</a:t>
+            </a:r>
+          </a:p>
+          <a:p>
+            <a:r>
+              <a:t>「自宅から通えば、下宿代もかかりません。都市部で一人暮らし＋授業料全額と比べると、差は相当大きくなります。</a:t>
             </a:r>
           </a:p>
           <a:p>
@@ -2180,12 +2300,28 @@
           <a:p/>
           <a:p>
             <a:r>
-              <a:t>※未確認事項：評定平均、専願かどうか、学校長推薦の要否、筆記試験免除の有無、免除の継続条件。</a:t>
-            </a:r>
-          </a:p>
-          <a:p>
-            <a:r>
-              <a:t> 質問が出たら「最新の入学者選抜要項で確認して回答します」と答えてください。推測で答えないこと。</a:t>
+              <a:t>※未確認事項：評定平均、専願かどうか、学校長推薦の要否、筆記試験免除の有無、**免除の対象年次と継続条件**、入学金の扱い。</a:t>
+            </a:r>
+          </a:p>
+          <a:p>
+            <a:r>
+              <a:t> 「4年間ずっと半額ですか」は必ず聞かれます。**答えないこと。**</a:t>
+            </a:r>
+          </a:p>
+          <a:p>
+            <a:r>
+              <a:t> 「そこは年度で変わる部分なので、私の記憶ではお答えせず、要項の数字でお返しします」と返してください。</a:t>
+            </a:r>
+          </a:p>
+          <a:p/>
+          <a:p>
+            <a:r>
+              <a:t>※「授業料半額」は今日2回出てきます。15枚目は留学中の分、ここは入試の優遇で、別の制度です。</a:t>
+            </a:r>
+          </a:p>
+          <a:p>
+            <a:r>
+              <a:t> 併用できるかは未確認。「両方使えます」とは言わないこと。</a:t>
             </a:r>
           </a:p>
         </p:txBody>
@@ -2373,7 +2509,17 @@
           </a:p>
           <a:p>
             <a:r>
-              <a:t>「このあと、個別相談のブースにいます。」「研究室の見学もできます。」</a:t>
+              <a:t>※ただし**当日の運営表を確認し、自分が実際にいる場所と時間だけを具体的に言うこと。**</a:t>
+            </a:r>
+          </a:p>
+          <a:p>
+            <a:r>
+              <a:t>　個別相談ブースの有無・場所、研究室開放、Bloomberg端末の見学可否は当日の運営次第です。</a:t>
+            </a:r>
+          </a:p>
+          <a:p>
+            <a:r>
+              <a:t>　未確認なら「このあとも会場内にいますので、声をかけてください」にとどめてください。</a:t>
             </a:r>
           </a:p>
           <a:p>
@@ -2464,7 +2610,12 @@
           </a:p>
           <a:p>
             <a:r>
-              <a:t>1「20分でぴったり終わります。時計は見なくて大丈夫です。」</a:t>
+              <a:t>1「◯分ほどで終わります。時計は見なくて大丈夫です。」——**持ち時間に合わせて実際の数字を入れること。**</a:t>
+            </a:r>
+          </a:p>
+          <a:p>
+            <a:r>
+              <a:t>　フル26枚は約29分です。20分枠なら、進行表.mdの「20分コース」に従って事前に7枚を非表示にしてください。</a:t>
             </a:r>
           </a:p>
           <a:p>
@@ -2576,6 +2727,11 @@
           </a:p>
           <a:p>
             <a:r>
+              <a:t>名前の読みはスライドに書いていません。ここで口頭で名乗ってください。</a:t>
+            </a:r>
+          </a:p>
+          <a:p>
+            <a:r>
               <a:t>肩書きより、現場の話をしてください。「毎年フィンランドに飛んで、まちのお金の流れを調べています。」</a:t>
             </a:r>
           </a:p>
@@ -2678,7 +2834,7 @@
           <a:lstStyle/>
           <a:p>
             <a:r>
-              <a:t>【全員を参加させる／60秒】</a:t>
+              <a:t>【全員を参加させる／45秒】</a:t>
             </a:r>
           </a:p>
           <a:p>
@@ -2769,7 +2925,7 @@
           <a:lstStyle/>
           <a:p>
             <a:r>
-              <a:t>【学問の入口を開く／75秒】</a:t>
+              <a:t>【学問の入口を開く／60秒】</a:t>
             </a:r>
           </a:p>
           <a:p>
@@ -3081,23 +3237,23 @@
           <a:p/>
           <a:p>
             <a:r>
-              <a:t>そのうえで手元を見させます。「配ったチラシに、同じ顔ぶれが載っています。」</a:t>
-            </a:r>
-          </a:p>
-          <a:p>
-            <a:r>
-              <a:t>紙に目を落とさせると、記憶に残ります。</a:t>
+              <a:t>※教員一覧が当日の配布物に載っているかは未確認です。**現物を確認してから言うこと。**</a:t>
+            </a:r>
+          </a:p>
+          <a:p>
+            <a:r>
+              <a:t>　載っていれば「配ったチラシの◯面に、8人の顔ぶれが載っています」と面まで言って手元を見させる。</a:t>
+            </a:r>
+          </a:p>
+          <a:p>
+            <a:r>
+              <a:t>　載っていなければ「名前と専門は、このあと個別にお伝えします」にとどめ、チラシを指さないこと。</a:t>
             </a:r>
           </a:p>
           <a:p/>
           <a:p>
             <a:r>
               <a:t>※旧版にあった教員一覧の表は、この会場では読めないので外しました。</a:t>
-            </a:r>
-          </a:p>
-          <a:p>
-            <a:r>
-              <a:t> 個別の先生の話が必要になったら、チラシを指しながら口頭で補ってください。</a:t>
             </a:r>
           </a:p>
         </p:txBody>
@@ -6285,7 +6441,7 @@
         <p:spPr>
           <a:xfrm>
             <a:off x="8549640" y="969264"/>
-            <a:ext cx="3322289" cy="896112"/>
+            <a:ext cx="3322289" cy="1719072"/>
           </a:xfrm>
           <a:prstGeom prst="rect">
             <a:avLst/>
@@ -6312,32 +6468,9 @@
                 <a:ea typeface="Meiryo"/>
                 <a:cs typeface="Meiryo"/>
               </a:rPr>
-              <a:t>旧版の表紙写真（NZ・リンカーン大学／2025年度TOP10プログラム）をここに配置</a:t>
-            </a:r>
-          </a:p>
-        </p:txBody>
-      </p:sp>
-      <p:sp>
-        <p:nvSpPr>
-          <p:cNvPr id="7" name="TextBox 6"/>
-          <p:cNvSpPr txBox="1"/>
-          <p:nvPr/>
-        </p:nvSpPr>
-        <p:spPr>
-          <a:xfrm>
-            <a:off x="8549640" y="5257800"/>
-            <a:ext cx="3322289" cy="1188720"/>
-          </a:xfrm>
-          <a:prstGeom prst="rect">
-            <a:avLst/>
-          </a:prstGeom>
-          <a:noFill/>
-        </p:spPr>
-        <p:txBody>
-          <a:bodyPr wrap="square" lIns="0" rIns="0" tIns="0" bIns="0" anchor="b">
-            <a:spAutoFit/>
-          </a:bodyPr>
-          <a:lstStyle/>
+              <a:t>2025年度TOP10プログラムで渡航した2年生9名の写真をここに配置。</a:t>
+            </a:r>
+          </a:p>
           <a:p>
             <a:pPr algn="l">
               <a:lnSpc>
@@ -6345,6 +6478,47 @@
               </a:lnSpc>
             </a:pPr>
             <a:r>
+              <a:rPr sz="1600" b="0" i="0">
+                <a:solidFill>
+                  <a:srgbClr val="C9DCF0"/>
+                </a:solidFill>
+                <a:latin typeface="Meiryo"/>
+                <a:ea typeface="Meiryo"/>
+                <a:cs typeface="Meiryo"/>
+              </a:rPr>
+              <a:t>14枚目で「これが9人です」と答え合わせをするので、必ず人物が写っているものを選ぶこと。</a:t>
+            </a:r>
+          </a:p>
+        </p:txBody>
+      </p:sp>
+      <p:sp>
+        <p:nvSpPr>
+          <p:cNvPr id="7" name="TextBox 6"/>
+          <p:cNvSpPr txBox="1"/>
+          <p:nvPr/>
+        </p:nvSpPr>
+        <p:spPr>
+          <a:xfrm>
+            <a:off x="8549640" y="5257800"/>
+            <a:ext cx="3322289" cy="1188720"/>
+          </a:xfrm>
+          <a:prstGeom prst="rect">
+            <a:avLst/>
+          </a:prstGeom>
+          <a:noFill/>
+        </p:spPr>
+        <p:txBody>
+          <a:bodyPr wrap="square" lIns="0" rIns="0" tIns="0" bIns="0" anchor="b">
+            <a:spAutoFit/>
+          </a:bodyPr>
+          <a:lstStyle/>
+          <a:p>
+            <a:pPr algn="l">
+              <a:lnSpc>
+                <a:spcPct val="135000"/>
+              </a:lnSpc>
+            </a:pPr>
+            <a:r>
               <a:rPr sz="2000" b="1" i="0">
                 <a:solidFill>
                   <a:srgbClr val="E2ECF7"/>
@@ -6412,7 +6586,7 @@
                 <a:ea typeface="Meiryo"/>
                 <a:cs typeface="Meiryo"/>
               </a:rPr>
-              <a:t>FUKUYAMA UNIVERSITY OPEN CAMPUS 2026</a:t>
+              <a:t>OPEN CAMPUS 2026</a:t>
             </a:r>
           </a:p>
         </p:txBody>
@@ -7289,7 +7463,7 @@
             <a:avLst/>
           </a:prstGeom>
           <a:solidFill>
-            <a:srgbClr val="6E9BCE"/>
+            <a:srgbClr val="2E76C0"/>
           </a:solidFill>
           <a:ln>
             <a:noFill/>
@@ -7368,7 +7542,7 @@
         <p:spPr>
           <a:xfrm>
             <a:off x="1069848" y="3570732"/>
-            <a:ext cx="2033008" cy="847344"/>
+            <a:ext cx="2033008" cy="451104"/>
           </a:xfrm>
           <a:prstGeom prst="rect">
             <a:avLst/>
@@ -7395,7 +7569,7 @@
                 <a:ea typeface="Meiryo"/>
                 <a:cs typeface="Meiryo"/>
               </a:rPr>
-              <a:t>英語の土台づくり</a:t>
+              <a:t>英語の土台</a:t>
             </a:r>
           </a:p>
         </p:txBody>
@@ -7516,7 +7690,7 @@
             <a:avLst/>
           </a:prstGeom>
           <a:solidFill>
-            <a:srgbClr val="2E76C0"/>
+            <a:srgbClr val="1160C4"/>
           </a:solidFill>
           <a:ln>
             <a:noFill/>
@@ -7743,7 +7917,7 @@
             <a:avLst/>
           </a:prstGeom>
           <a:solidFill>
-            <a:srgbClr val="1160C4"/>
+            <a:srgbClr val="0B4C9E"/>
           </a:solidFill>
           <a:ln>
             <a:noFill/>
@@ -8049,7 +8223,7 @@
         <p:spPr>
           <a:xfrm>
             <a:off x="9089113" y="3125724"/>
-            <a:ext cx="2033008" cy="847344"/>
+            <a:ext cx="2033008" cy="451104"/>
           </a:xfrm>
           <a:prstGeom prst="rect">
             <a:avLst/>
@@ -8076,7 +8250,7 @@
                 <a:ea typeface="Meiryo"/>
                 <a:cs typeface="Meiryo"/>
               </a:rPr>
-              <a:t>経験をキャリアへ</a:t>
+              <a:t>キャリアへ</a:t>
             </a:r>
           </a:p>
         </p:txBody>
@@ -8444,7 +8618,7 @@
                 <a:ea typeface="Meiryo"/>
                 <a:cs typeface="Meiryo"/>
               </a:rPr>
-              <a:t>1年生は、まだ海外には行きません。</a:t>
+              <a:t>1年生は、まず英語の土台からです。</a:t>
             </a:r>
           </a:p>
         </p:txBody>
@@ -8699,7 +8873,7 @@
                 <a:ea typeface="Meiryo"/>
                 <a:cs typeface="Meiryo"/>
               </a:rPr>
-              <a:t>授業：ビジネス英語入門ほか</a:t>
+              <a:t>留学に必要な語学力を、授業でつける</a:t>
             </a:r>
           </a:p>
         </p:txBody>
@@ -9407,8 +9581,8 @@
         </p:nvSpPr>
         <p:spPr>
           <a:xfrm>
-            <a:off x="7562088" y="3253740"/>
-            <a:ext cx="3468593" cy="347472"/>
+            <a:off x="7562088" y="3198876"/>
+            <a:ext cx="3468593" cy="329184"/>
           </a:xfrm>
           <a:prstGeom prst="rect">
             <a:avLst/>
@@ -9448,8 +9622,8 @@
         </p:nvSpPr>
         <p:spPr>
           <a:xfrm>
-            <a:off x="7562088" y="3619500"/>
-            <a:ext cx="3468593" cy="512064"/>
+            <a:off x="7562088" y="3546348"/>
+            <a:ext cx="3468593" cy="493776"/>
           </a:xfrm>
           <a:prstGeom prst="rect">
             <a:avLst/>
@@ -9489,8 +9663,8 @@
         </p:nvSpPr>
         <p:spPr>
           <a:xfrm>
-            <a:off x="7562088" y="4314444"/>
-            <a:ext cx="3468593" cy="347472"/>
+            <a:off x="7562088" y="4259580"/>
+            <a:ext cx="3468593" cy="329184"/>
           </a:xfrm>
           <a:prstGeom prst="rect">
             <a:avLst/>
@@ -9530,8 +9704,8 @@
         </p:nvSpPr>
         <p:spPr>
           <a:xfrm>
-            <a:off x="7562088" y="4680204"/>
-            <a:ext cx="3468593" cy="512064"/>
+            <a:off x="7562088" y="4607052"/>
+            <a:ext cx="3468593" cy="493776"/>
           </a:xfrm>
           <a:prstGeom prst="rect">
             <a:avLst/>
@@ -9801,7 +9975,7 @@
         <p:spPr>
           <a:xfrm>
             <a:off x="868680" y="2193036"/>
-            <a:ext cx="5989320" cy="3659124"/>
+            <a:ext cx="5669280" cy="3659124"/>
           </a:xfrm>
           <a:prstGeom prst="rect">
             <a:avLst/>
@@ -9889,7 +10063,7 @@
         <p:spPr>
           <a:xfrm>
             <a:off x="1179576" y="4892040"/>
-            <a:ext cx="5367528" cy="777240"/>
+            <a:ext cx="5047488" cy="777240"/>
           </a:xfrm>
           <a:prstGeom prst="rect">
             <a:avLst/>
@@ -9929,8 +10103,8 @@
         </p:nvSpPr>
         <p:spPr>
           <a:xfrm>
-            <a:off x="1179576" y="2449068"/>
-            <a:ext cx="5367528" cy="310896"/>
+            <a:off x="1179576" y="2430780"/>
+            <a:ext cx="5047488" cy="672084"/>
           </a:xfrm>
           <a:prstGeom prst="rect">
             <a:avLst/>
@@ -9949,87 +10123,28 @@
               </a:lnSpc>
             </a:pPr>
             <a:r>
-              <a:rPr sz="1800" b="1" i="0">
-                <a:solidFill>
-                  <a:srgbClr val="41505F"/>
+              <a:rPr sz="1200" b="0" i="0">
+                <a:solidFill>
+                  <a:srgbClr val="9BABBC"/>
                 </a:solidFill>
                 <a:latin typeface="Meiryo"/>
                 <a:ea typeface="Meiryo"/>
                 <a:cs typeface="Meiryo"/>
               </a:rPr>
-              <a:t>［写真を差し込む位置］</a:t>
-            </a:r>
-          </a:p>
-        </p:txBody>
-      </p:sp>
-      <p:sp>
-        <p:nvSpPr>
-          <p:cNvPr id="10" name="TextBox 9"/>
-          <p:cNvSpPr txBox="1"/>
-          <p:nvPr/>
-        </p:nvSpPr>
-        <p:spPr>
-          <a:xfrm>
-            <a:off x="1179576" y="2833116"/>
-            <a:ext cx="5367528" cy="847344"/>
-          </a:xfrm>
-          <a:prstGeom prst="rect">
-            <a:avLst/>
-          </a:prstGeom>
-          <a:noFill/>
-        </p:spPr>
-        <p:txBody>
-          <a:bodyPr wrap="square" lIns="0" rIns="0" tIns="0" bIns="0" anchor="t">
-            <a:spAutoFit/>
-          </a:bodyPr>
-          <a:lstStyle/>
-          <a:p>
-            <a:pPr algn="l">
-              <a:lnSpc>
-                <a:spcPct val="130000"/>
-              </a:lnSpc>
-            </a:pPr>
-            <a:r>
-              <a:rPr sz="1600" b="0" i="0">
-                <a:solidFill>
-                  <a:srgbClr val="41505F"/>
-                </a:solidFill>
-                <a:latin typeface="Meiryo"/>
-                <a:ea typeface="Meiryo"/>
-                <a:cs typeface="Meiryo"/>
-              </a:rPr>
-              <a:t>旧版のNZ写真（キウイフルーツ農園の企業訪問／リンカーン大学）をここに配置。</a:t>
-            </a:r>
-          </a:p>
-          <a:p>
-            <a:pPr algn="l">
-              <a:lnSpc>
-                <a:spcPct val="130000"/>
-              </a:lnSpc>
-            </a:pPr>
-            <a:r>
-              <a:rPr sz="1600" b="0" i="0">
-                <a:solidFill>
-                  <a:srgbClr val="41505F"/>
-                </a:solidFill>
-                <a:latin typeface="Meiryo"/>
-                <a:ea typeface="Meiryo"/>
-                <a:cs typeface="Meiryo"/>
-              </a:rPr>
-              <a:t>大きく1枚だけ使うこと。</a:t>
-            </a:r>
-          </a:p>
-        </p:txBody>
-      </p:sp>
-      <p:sp>
-        <p:nvSpPr>
-          <p:cNvPr id="11" name="Oval 10"/>
+              <a:t>［写真を差し込む位置］　旧版のNZ写真（キウイフルーツ農園の企業訪問／リンカーン大学）をここに配置。 大きく1枚だけ使うこと。</a:t>
+            </a:r>
+          </a:p>
+        </p:txBody>
+      </p:sp>
+      <p:sp>
+        <p:nvSpPr>
+          <p:cNvPr id="10" name="Oval 9"/>
           <p:cNvSpPr/>
           <p:nvPr/>
         </p:nvSpPr>
         <p:spPr>
           <a:xfrm>
-            <a:off x="7333488" y="2404872"/>
+            <a:off x="7013448" y="2404872"/>
             <a:ext cx="155448" cy="155448"/>
           </a:xfrm>
           <a:prstGeom prst="ellipse">
@@ -10067,14 +10182,14 @@
       </p:sp>
       <p:sp>
         <p:nvSpPr>
-          <p:cNvPr id="12" name="TextBox 11"/>
+          <p:cNvPr id="11" name="TextBox 10"/>
           <p:cNvSpPr txBox="1"/>
           <p:nvPr/>
         </p:nvSpPr>
         <p:spPr>
           <a:xfrm>
-            <a:off x="7699248" y="2266188"/>
-            <a:ext cx="3624041" cy="970280"/>
+            <a:off x="7379208" y="2266188"/>
+            <a:ext cx="3944081" cy="508000"/>
           </a:xfrm>
           <a:prstGeom prst="rect">
             <a:avLst/>
@@ -10101,20 +10216,20 @@
                 <a:ea typeface="Meiryo"/>
                 <a:cs typeface="Meiryo"/>
               </a:rPr>
-              <a:t>参加：選抜された2年生 9名</a:t>
-            </a:r>
-          </a:p>
-        </p:txBody>
-      </p:sp>
-      <p:sp>
-        <p:nvSpPr>
-          <p:cNvPr id="13" name="Oval 12"/>
+              <a:t>2年生 9名（選抜）</a:t>
+            </a:r>
+          </a:p>
+        </p:txBody>
+      </p:sp>
+      <p:sp>
+        <p:nvSpPr>
+          <p:cNvPr id="12" name="Oval 11"/>
           <p:cNvSpPr/>
           <p:nvPr/>
         </p:nvSpPr>
         <p:spPr>
           <a:xfrm>
-            <a:off x="7333488" y="3658616"/>
+            <a:off x="7013448" y="3196336"/>
             <a:ext cx="155448" cy="155448"/>
           </a:xfrm>
           <a:prstGeom prst="ellipse">
@@ -10152,14 +10267,14 @@
       </p:sp>
       <p:sp>
         <p:nvSpPr>
-          <p:cNvPr id="14" name="TextBox 13"/>
+          <p:cNvPr id="13" name="TextBox 12"/>
           <p:cNvSpPr txBox="1"/>
           <p:nvPr/>
         </p:nvSpPr>
         <p:spPr>
           <a:xfrm>
-            <a:off x="7699248" y="3519932"/>
-            <a:ext cx="3624041" cy="970280"/>
+            <a:off x="7379208" y="3057652"/>
+            <a:ext cx="3944081" cy="508000"/>
           </a:xfrm>
           <a:prstGeom prst="rect">
             <a:avLst/>
@@ -10186,20 +10301,20 @@
                 <a:ea typeface="Meiryo"/>
                 <a:cs typeface="Meiryo"/>
               </a:rPr>
-              <a:t>NZ3都市（オークランドほか）</a:t>
-            </a:r>
-          </a:p>
-        </p:txBody>
-      </p:sp>
-      <p:sp>
-        <p:nvSpPr>
-          <p:cNvPr id="15" name="Oval 14"/>
+              <a:t>NZ 3都市を訪問</a:t>
+            </a:r>
+          </a:p>
+        </p:txBody>
+      </p:sp>
+      <p:sp>
+        <p:nvSpPr>
+          <p:cNvPr id="14" name="Oval 13"/>
           <p:cNvSpPr/>
           <p:nvPr/>
         </p:nvSpPr>
         <p:spPr>
           <a:xfrm>
-            <a:off x="7333488" y="4912360"/>
+            <a:off x="7013448" y="3987799"/>
             <a:ext cx="155448" cy="155448"/>
           </a:xfrm>
           <a:prstGeom prst="ellipse">
@@ -10237,14 +10352,14 @@
       </p:sp>
       <p:sp>
         <p:nvSpPr>
-          <p:cNvPr id="16" name="TextBox 15"/>
+          <p:cNvPr id="15" name="TextBox 14"/>
           <p:cNvSpPr txBox="1"/>
           <p:nvPr/>
         </p:nvSpPr>
         <p:spPr>
           <a:xfrm>
-            <a:off x="7699248" y="4773676"/>
-            <a:ext cx="3624041" cy="970280"/>
+            <a:off x="7379208" y="3849116"/>
+            <a:ext cx="3944081" cy="508000"/>
           </a:xfrm>
           <a:prstGeom prst="rect">
             <a:avLst/>
@@ -10271,14 +10386,99 @@
                 <a:ea typeface="Meiryo"/>
                 <a:cs typeface="Meiryo"/>
               </a:rPr>
-              <a:t>語学研修・企業訪問・ホームステイ</a:t>
-            </a:r>
+              <a:t>語学研修・企業訪問</a:t>
+            </a:r>
+          </a:p>
+        </p:txBody>
+      </p:sp>
+      <p:sp>
+        <p:nvSpPr>
+          <p:cNvPr id="16" name="Oval 15"/>
+          <p:cNvSpPr/>
+          <p:nvPr/>
+        </p:nvSpPr>
+        <p:spPr>
+          <a:xfrm>
+            <a:off x="7013448" y="4779264"/>
+            <a:ext cx="155448" cy="155448"/>
+          </a:xfrm>
+          <a:prstGeom prst="ellipse">
+            <a:avLst/>
+          </a:prstGeom>
+          <a:solidFill>
+            <a:srgbClr val="1160C4"/>
+          </a:solidFill>
+          <a:ln>
+            <a:noFill/>
+          </a:ln>
+          <a:effectLst/>
+        </p:spPr>
+        <p:style>
+          <a:lnRef idx="1">
+            <a:schemeClr val="accent1"/>
+          </a:lnRef>
+          <a:fillRef idx="3">
+            <a:schemeClr val="accent1"/>
+          </a:fillRef>
+          <a:effectRef idx="2">
+            <a:schemeClr val="accent1"/>
+          </a:effectRef>
+          <a:fontRef idx="minor">
+            <a:schemeClr val="lt1"/>
+          </a:fontRef>
+        </p:style>
+        <p:txBody>
+          <a:bodyPr rtlCol="0" anchor="ctr" wrap="square"/>
+          <a:lstStyle/>
+          <a:p>
+            <a:pPr algn="ctr"/>
           </a:p>
         </p:txBody>
       </p:sp>
       <p:sp>
         <p:nvSpPr>
           <p:cNvPr id="17" name="TextBox 16"/>
+          <p:cNvSpPr txBox="1"/>
+          <p:nvPr/>
+        </p:nvSpPr>
+        <p:spPr>
+          <a:xfrm>
+            <a:off x="7379208" y="4640580"/>
+            <a:ext cx="3944081" cy="508000"/>
+          </a:xfrm>
+          <a:prstGeom prst="rect">
+            <a:avLst/>
+          </a:prstGeom>
+          <a:noFill/>
+        </p:spPr>
+        <p:txBody>
+          <a:bodyPr wrap="square" lIns="0" rIns="0" tIns="0" bIns="0" anchor="t">
+            <a:spAutoFit/>
+          </a:bodyPr>
+          <a:lstStyle/>
+          <a:p>
+            <a:pPr algn="l">
+              <a:lnSpc>
+                <a:spcPct val="140000"/>
+              </a:lnSpc>
+            </a:pPr>
+            <a:r>
+              <a:rPr sz="2600" b="0" i="0">
+                <a:solidFill>
+                  <a:srgbClr val="12253F"/>
+                </a:solidFill>
+                <a:latin typeface="Meiryo"/>
+                <a:ea typeface="Meiryo"/>
+                <a:cs typeface="Meiryo"/>
+              </a:rPr>
+              <a:t>ホームステイ</a:t>
+            </a:r>
+          </a:p>
+        </p:txBody>
+      </p:sp>
+      <p:sp>
+        <p:nvSpPr>
+          <p:cNvPr id="18" name="TextBox 17"/>
           <p:cNvSpPr txBox="1"/>
           <p:nvPr/>
         </p:nvSpPr>
@@ -10554,7 +10754,7 @@
         </p:nvSpPr>
         <p:spPr>
           <a:xfrm>
-            <a:off x="886968" y="3164586"/>
+            <a:off x="886968" y="3175254"/>
             <a:ext cx="155448" cy="155448"/>
           </a:xfrm>
           <a:prstGeom prst="ellipse">
@@ -10599,7 +10799,7 @@
         <p:spPr>
           <a:xfrm>
             <a:off x="1252728" y="3036570"/>
-            <a:ext cx="5605272" cy="899160"/>
+            <a:ext cx="5605272" cy="508000"/>
           </a:xfrm>
           <a:prstGeom prst="rect">
             <a:avLst/>
@@ -10618,7 +10818,7 @@
               </a:lnSpc>
             </a:pPr>
             <a:r>
-              <a:rPr sz="2400" b="0" i="0">
+              <a:rPr sz="2600" b="0" i="0">
                 <a:solidFill>
                   <a:srgbClr val="12253F"/>
                 </a:solidFill>
@@ -10626,7 +10826,7 @@
                 <a:ea typeface="Meiryo"/>
                 <a:cs typeface="Meiryo"/>
               </a:rPr>
-              <a:t>派遣先（予定）：12ヶ国・地域 25大学</a:t>
+              <a:t>派遣先（予定）：12ヶ国・25大学</a:t>
             </a:r>
           </a:p>
         </p:txBody>
@@ -10639,7 +10839,7 @@
         </p:nvSpPr>
         <p:spPr>
           <a:xfrm>
-            <a:off x="886968" y="4274058"/>
+            <a:off x="886968" y="3948430"/>
             <a:ext cx="155448" cy="155448"/>
           </a:xfrm>
           <a:prstGeom prst="ellipse">
@@ -10683,8 +10883,8 @@
         </p:nvSpPr>
         <p:spPr>
           <a:xfrm>
-            <a:off x="1252728" y="4146042"/>
-            <a:ext cx="5605272" cy="472439"/>
+            <a:off x="1252728" y="3809746"/>
+            <a:ext cx="5605272" cy="508000"/>
           </a:xfrm>
           <a:prstGeom prst="rect">
             <a:avLst/>
@@ -10703,7 +10903,7 @@
               </a:lnSpc>
             </a:pPr>
             <a:r>
-              <a:rPr sz="2400" b="0" i="0">
+              <a:rPr sz="2600" b="0" i="0">
                 <a:solidFill>
                   <a:srgbClr val="12253F"/>
                 </a:solidFill>
@@ -10724,7 +10924,7 @@
         </p:nvSpPr>
         <p:spPr>
           <a:xfrm>
-            <a:off x="886968" y="4956810"/>
+            <a:off x="886968" y="4721606"/>
             <a:ext cx="155448" cy="155448"/>
           </a:xfrm>
           <a:prstGeom prst="ellipse">
@@ -10768,8 +10968,8 @@
         </p:nvSpPr>
         <p:spPr>
           <a:xfrm>
-            <a:off x="1252728" y="4828794"/>
-            <a:ext cx="5605272" cy="472439"/>
+            <a:off x="1252728" y="4582922"/>
+            <a:ext cx="5605272" cy="508000"/>
           </a:xfrm>
           <a:prstGeom prst="rect">
             <a:avLst/>
@@ -10788,7 +10988,7 @@
               </a:lnSpc>
             </a:pPr>
             <a:r>
-              <a:rPr sz="2400" b="0" i="0">
+              <a:rPr sz="2600" b="0" i="0">
                 <a:solidFill>
                   <a:srgbClr val="12253F"/>
                 </a:solidFill>
@@ -10938,8 +11138,8 @@
         </p:nvSpPr>
         <p:spPr>
           <a:xfrm>
-            <a:off x="7562088" y="3253740"/>
-            <a:ext cx="3468593" cy="347472"/>
+            <a:off x="7562088" y="3198876"/>
+            <a:ext cx="3468593" cy="329184"/>
           </a:xfrm>
           <a:prstGeom prst="rect">
             <a:avLst/>
@@ -10979,8 +11179,8 @@
         </p:nvSpPr>
         <p:spPr>
           <a:xfrm>
-            <a:off x="7562088" y="3619500"/>
-            <a:ext cx="3468593" cy="512064"/>
+            <a:off x="7562088" y="3546348"/>
+            <a:ext cx="3468593" cy="493776"/>
           </a:xfrm>
           <a:prstGeom prst="rect">
             <a:avLst/>
@@ -11020,8 +11220,8 @@
         </p:nvSpPr>
         <p:spPr>
           <a:xfrm>
-            <a:off x="7562088" y="4314444"/>
-            <a:ext cx="3468593" cy="347472"/>
+            <a:off x="7562088" y="4212336"/>
+            <a:ext cx="3468593" cy="329184"/>
           </a:xfrm>
           <a:prstGeom prst="rect">
             <a:avLst/>
@@ -11061,8 +11261,8 @@
         </p:nvSpPr>
         <p:spPr>
           <a:xfrm>
-            <a:off x="7562088" y="4680204"/>
-            <a:ext cx="3468593" cy="512064"/>
+            <a:off x="7562088" y="4559808"/>
+            <a:ext cx="3468593" cy="493776"/>
           </a:xfrm>
           <a:prstGeom prst="rect">
             <a:avLst/>
@@ -11655,7 +11855,7 @@
                 <a:ea typeface="Meiryo"/>
                 <a:cs typeface="Meiryo"/>
               </a:rPr>
-              <a:t>2年 研修費 30万円（選抜10名程度）</a:t>
+              <a:t>2年 研修費 30万円（選抜10名）</a:t>
             </a:r>
           </a:p>
         </p:txBody>
@@ -11740,7 +11940,7 @@
                 <a:ea typeface="Meiryo"/>
                 <a:cs typeface="Meiryo"/>
               </a:rPr>
-              <a:t>3年 留学 最大62万円（選抜10名程度）</a:t>
+              <a:t>3年 留学 最大62万円（選抜10名）</a:t>
             </a:r>
           </a:p>
         </p:txBody>
@@ -12749,7 +12949,7 @@
                 <a:ea typeface="Meiryo"/>
                 <a:cs typeface="Meiryo"/>
               </a:rPr>
-              <a:t>語学研修（ニュージーランド）</a:t>
+              <a:t>語学研修（NZ）</a:t>
             </a:r>
           </a:p>
         </p:txBody>
@@ -12762,8 +12962,8 @@
         </p:nvSpPr>
         <p:spPr>
           <a:xfrm>
-            <a:off x="7976585" y="2130552"/>
-            <a:ext cx="3035808" cy="310896"/>
+            <a:off x="7976585" y="2112263"/>
+            <a:ext cx="3035808" cy="466344"/>
           </a:xfrm>
           <a:prstGeom prst="rect">
             <a:avLst/>
@@ -12782,63 +12982,22 @@
               </a:lnSpc>
             </a:pPr>
             <a:r>
-              <a:rPr sz="1800" b="1" i="0">
-                <a:solidFill>
-                  <a:srgbClr val="41505F"/>
+              <a:rPr sz="1200" b="0" i="0">
+                <a:solidFill>
+                  <a:srgbClr val="9BABBC"/>
                 </a:solidFill>
                 <a:latin typeface="Meiryo"/>
                 <a:ea typeface="Meiryo"/>
                 <a:cs typeface="Meiryo"/>
               </a:rPr>
-              <a:t>［写真を差し込む位置］</a:t>
-            </a:r>
-          </a:p>
-        </p:txBody>
-      </p:sp>
-      <p:sp>
-        <p:nvSpPr>
-          <p:cNvPr id="10" name="TextBox 9"/>
-          <p:cNvSpPr txBox="1"/>
-          <p:nvPr/>
-        </p:nvSpPr>
-        <p:spPr>
-          <a:xfrm>
-            <a:off x="7976585" y="2514600"/>
-            <a:ext cx="3035808" cy="583184"/>
-          </a:xfrm>
-          <a:prstGeom prst="rect">
-            <a:avLst/>
-          </a:prstGeom>
-          <a:noFill/>
-        </p:spPr>
-        <p:txBody>
-          <a:bodyPr wrap="square" lIns="0" rIns="0" tIns="0" bIns="0" anchor="t">
-            <a:spAutoFit/>
-          </a:bodyPr>
-          <a:lstStyle/>
-          <a:p>
-            <a:pPr algn="l">
-              <a:lnSpc>
-                <a:spcPct val="130000"/>
-              </a:lnSpc>
-            </a:pPr>
-            <a:r>
-              <a:rPr sz="1600" b="0" i="0">
-                <a:solidFill>
-                  <a:srgbClr val="41505F"/>
-                </a:solidFill>
-                <a:latin typeface="Meiryo"/>
-                <a:ea typeface="Meiryo"/>
-                <a:cs typeface="Meiryo"/>
-              </a:rPr>
-              <a:t>旧版のNZ語学研修の授業風景をここに配置</a:t>
-            </a:r>
-          </a:p>
-        </p:txBody>
-      </p:sp>
-      <p:sp>
-        <p:nvSpPr>
-          <p:cNvPr id="11" name="Oval 10"/>
+              <a:t>［写真を差し込む位置］　旧版のNZ語学研修の授業風景をここに配置</a:t>
+            </a:r>
+          </a:p>
+        </p:txBody>
+      </p:sp>
+      <p:sp>
+        <p:nvSpPr>
+          <p:cNvPr id="10" name="Oval 9"/>
           <p:cNvSpPr/>
           <p:nvPr/>
         </p:nvSpPr>
@@ -12882,7 +13041,7 @@
       </p:sp>
       <p:sp>
         <p:nvSpPr>
-          <p:cNvPr id="12" name="TextBox 11"/>
+          <p:cNvPr id="11" name="TextBox 10"/>
           <p:cNvSpPr txBox="1"/>
           <p:nvPr/>
         </p:nvSpPr>
@@ -12923,7 +13082,7 @@
       </p:sp>
       <p:sp>
         <p:nvSpPr>
-          <p:cNvPr id="13" name="Oval 12"/>
+          <p:cNvPr id="12" name="Oval 11"/>
           <p:cNvSpPr/>
           <p:nvPr/>
         </p:nvSpPr>
@@ -12967,7 +13126,7 @@
       </p:sp>
       <p:sp>
         <p:nvSpPr>
-          <p:cNvPr id="14" name="TextBox 13"/>
+          <p:cNvPr id="13" name="TextBox 12"/>
           <p:cNvSpPr txBox="1"/>
           <p:nvPr/>
         </p:nvSpPr>
@@ -13008,7 +13167,7 @@
       </p:sp>
       <p:sp>
         <p:nvSpPr>
-          <p:cNvPr id="15" name="Oval 14"/>
+          <p:cNvPr id="14" name="Oval 13"/>
           <p:cNvSpPr/>
           <p:nvPr/>
         </p:nvSpPr>
@@ -13052,7 +13211,7 @@
       </p:sp>
       <p:sp>
         <p:nvSpPr>
-          <p:cNvPr id="16" name="TextBox 15"/>
+          <p:cNvPr id="15" name="TextBox 14"/>
           <p:cNvSpPr txBox="1"/>
           <p:nvPr/>
         </p:nvSpPr>
@@ -13093,7 +13252,7 @@
       </p:sp>
       <p:sp>
         <p:nvSpPr>
-          <p:cNvPr id="17" name="Oval 16"/>
+          <p:cNvPr id="16" name="Oval 15"/>
           <p:cNvSpPr/>
           <p:nvPr/>
         </p:nvSpPr>
@@ -13137,14 +13296,14 @@
       </p:sp>
       <p:sp>
         <p:nvSpPr>
-          <p:cNvPr id="18" name="TextBox 17"/>
+          <p:cNvPr id="17" name="TextBox 16"/>
           <p:cNvSpPr txBox="1"/>
           <p:nvPr/>
         </p:nvSpPr>
         <p:spPr>
           <a:xfrm>
             <a:off x="1252728" y="4418075"/>
-            <a:ext cx="6092921" cy="543560"/>
+            <a:ext cx="6092921" cy="1041400"/>
           </a:xfrm>
           <a:prstGeom prst="rect">
             <a:avLst/>
@@ -13171,14 +13330,14 @@
                 <a:ea typeface="Meiryo"/>
                 <a:cs typeface="Meiryo"/>
               </a:rPr>
-              <a:t>留学生とキャンパスで毎日交流</a:t>
-            </a:r>
-          </a:p>
-        </p:txBody>
-      </p:sp>
-      <p:sp>
-        <p:nvSpPr>
-          <p:cNvPr id="19" name="TextBox 18"/>
+              <a:t>留学生とキャンパスで日常的に交流</a:t>
+            </a:r>
+          </a:p>
+        </p:txBody>
+      </p:sp>
+      <p:sp>
+        <p:nvSpPr>
+          <p:cNvPr id="18" name="TextBox 17"/>
           <p:cNvSpPr txBox="1"/>
           <p:nvPr/>
         </p:nvSpPr>
@@ -13529,7 +13688,7 @@
                 <a:ea typeface="Meiryo"/>
                 <a:cs typeface="Meiryo"/>
               </a:rPr>
-              <a:t>Japan Fiesta ／ ニュージーランド</a:t>
+              <a:t>Japan Fiesta</a:t>
             </a:r>
           </a:p>
         </p:txBody>
@@ -13542,8 +13701,8 @@
         </p:nvSpPr>
         <p:spPr>
           <a:xfrm>
-            <a:off x="7976585" y="2130552"/>
-            <a:ext cx="3035808" cy="310896"/>
+            <a:off x="7976585" y="2112263"/>
+            <a:ext cx="3035808" cy="672084"/>
           </a:xfrm>
           <a:prstGeom prst="rect">
             <a:avLst/>
@@ -13562,63 +13721,22 @@
               </a:lnSpc>
             </a:pPr>
             <a:r>
-              <a:rPr sz="1800" b="1" i="0">
-                <a:solidFill>
-                  <a:srgbClr val="41505F"/>
+              <a:rPr sz="1200" b="0" i="0">
+                <a:solidFill>
+                  <a:srgbClr val="9BABBC"/>
                 </a:solidFill>
                 <a:latin typeface="Meiryo"/>
                 <a:ea typeface="Meiryo"/>
                 <a:cs typeface="Meiryo"/>
               </a:rPr>
-              <a:t>［写真を差し込む位置］</a:t>
-            </a:r>
-          </a:p>
-        </p:txBody>
-      </p:sp>
-      <p:sp>
-        <p:nvSpPr>
-          <p:cNvPr id="10" name="TextBox 9"/>
-          <p:cNvSpPr txBox="1"/>
-          <p:nvPr/>
-        </p:nvSpPr>
-        <p:spPr>
-          <a:xfrm>
-            <a:off x="7976585" y="2514600"/>
-            <a:ext cx="3035808" cy="847344"/>
-          </a:xfrm>
-          <a:prstGeom prst="rect">
-            <a:avLst/>
-          </a:prstGeom>
-          <a:noFill/>
-        </p:spPr>
-        <p:txBody>
-          <a:bodyPr wrap="square" lIns="0" rIns="0" tIns="0" bIns="0" anchor="t">
-            <a:spAutoFit/>
-          </a:bodyPr>
-          <a:lstStyle/>
-          <a:p>
-            <a:pPr algn="l">
-              <a:lnSpc>
-                <a:spcPct val="130000"/>
-              </a:lnSpc>
-            </a:pPr>
-            <a:r>
-              <a:rPr sz="1600" b="0" i="0">
-                <a:solidFill>
-                  <a:srgbClr val="41505F"/>
-                </a:solidFill>
-                <a:latin typeface="Meiryo"/>
-                <a:ea typeface="Meiryo"/>
-                <a:cs typeface="Meiryo"/>
-              </a:rPr>
-              <a:t>Japan Fiesta（デニム折り紙・ばら）の写真をここに配置</a:t>
-            </a:r>
-          </a:p>
-        </p:txBody>
-      </p:sp>
-      <p:sp>
-        <p:nvSpPr>
-          <p:cNvPr id="11" name="Oval 10"/>
+              <a:t>［写真を差し込む位置］　Japan Fiesta（デニム折り紙・ばら）の写真をここに配置</a:t>
+            </a:r>
+          </a:p>
+        </p:txBody>
+      </p:sp>
+      <p:sp>
+        <p:nvSpPr>
+          <p:cNvPr id="10" name="Oval 9"/>
           <p:cNvSpPr/>
           <p:nvPr/>
         </p:nvSpPr>
@@ -13662,7 +13780,7 @@
       </p:sp>
       <p:sp>
         <p:nvSpPr>
-          <p:cNvPr id="12" name="TextBox 11"/>
+          <p:cNvPr id="11" name="TextBox 10"/>
           <p:cNvSpPr txBox="1"/>
           <p:nvPr/>
         </p:nvSpPr>
@@ -13703,7 +13821,7 @@
       </p:sp>
       <p:sp>
         <p:nvSpPr>
-          <p:cNvPr id="13" name="Oval 12"/>
+          <p:cNvPr id="12" name="Oval 11"/>
           <p:cNvSpPr/>
           <p:nvPr/>
         </p:nvSpPr>
@@ -13747,7 +13865,7 @@
       </p:sp>
       <p:sp>
         <p:nvSpPr>
-          <p:cNvPr id="14" name="TextBox 13"/>
+          <p:cNvPr id="13" name="TextBox 12"/>
           <p:cNvSpPr txBox="1"/>
           <p:nvPr/>
         </p:nvSpPr>
@@ -13788,7 +13906,7 @@
       </p:sp>
       <p:sp>
         <p:nvSpPr>
-          <p:cNvPr id="15" name="Oval 14"/>
+          <p:cNvPr id="14" name="Oval 13"/>
           <p:cNvSpPr/>
           <p:nvPr/>
         </p:nvSpPr>
@@ -13832,7 +13950,7 @@
       </p:sp>
       <p:sp>
         <p:nvSpPr>
-          <p:cNvPr id="16" name="TextBox 15"/>
+          <p:cNvPr id="15" name="TextBox 14"/>
           <p:cNvSpPr txBox="1"/>
           <p:nvPr/>
         </p:nvSpPr>
@@ -13873,7 +13991,7 @@
       </p:sp>
       <p:sp>
         <p:nvSpPr>
-          <p:cNvPr id="17" name="Oval 16"/>
+          <p:cNvPr id="16" name="Oval 15"/>
           <p:cNvSpPr/>
           <p:nvPr/>
         </p:nvSpPr>
@@ -13917,7 +14035,7 @@
       </p:sp>
       <p:sp>
         <p:nvSpPr>
-          <p:cNvPr id="18" name="TextBox 17"/>
+          <p:cNvPr id="17" name="TextBox 16"/>
           <p:cNvSpPr txBox="1"/>
           <p:nvPr/>
         </p:nvSpPr>
@@ -13958,7 +14076,7 @@
       </p:sp>
       <p:sp>
         <p:nvSpPr>
-          <p:cNvPr id="19" name="TextBox 18"/>
+          <p:cNvPr id="18" name="TextBox 17"/>
           <p:cNvSpPr txBox="1"/>
           <p:nvPr/>
         </p:nvSpPr>
@@ -15017,7 +15135,7 @@
             <a:r>
               <a:rPr sz="15000" b="1" i="0">
                 <a:solidFill>
-                  <a:srgbClr val="3A6699"/>
+                  <a:srgbClr val="3E8F84"/>
                 </a:solidFill>
                 <a:latin typeface="Meiryo"/>
                 <a:ea typeface="Meiryo"/>
@@ -16779,7 +16897,7 @@
         <p:spPr>
           <a:xfrm>
             <a:off x="1252728" y="2193036"/>
-            <a:ext cx="5605272" cy="970280"/>
+            <a:ext cx="5605272" cy="508000"/>
           </a:xfrm>
           <a:prstGeom prst="rect">
             <a:avLst/>
@@ -16806,7 +16924,7 @@
                 <a:ea typeface="Meiryo"/>
                 <a:cs typeface="Meiryo"/>
               </a:rPr>
-              <a:t>英検 準2級 ＝ 学科独自入試の出願要件</a:t>
+              <a:t>英検 準2級＝入試の出願要件</a:t>
             </a:r>
           </a:p>
         </p:txBody>
@@ -16819,7 +16937,7 @@
         </p:nvSpPr>
         <p:spPr>
           <a:xfrm>
-            <a:off x="886968" y="3567176"/>
+            <a:off x="886968" y="3104896"/>
             <a:ext cx="155448" cy="155448"/>
           </a:xfrm>
           <a:prstGeom prst="ellipse">
@@ -16863,7 +16981,7 @@
         </p:nvSpPr>
         <p:spPr>
           <a:xfrm>
-            <a:off x="1252728" y="3428492"/>
+            <a:off x="1252728" y="2966212"/>
             <a:ext cx="5605272" cy="970280"/>
           </a:xfrm>
           <a:prstGeom prst="rect">
@@ -16891,7 +17009,7 @@
                 <a:ea typeface="Meiryo"/>
                 <a:cs typeface="Meiryo"/>
               </a:rPr>
-              <a:t>中国語 HSK 3級 ＝ 同じく出願要件</a:t>
+              <a:t>中国語 HSK 3級＝同じく出願要件</a:t>
             </a:r>
           </a:p>
         </p:txBody>
@@ -16904,7 +17022,7 @@
         </p:nvSpPr>
         <p:spPr>
           <a:xfrm>
-            <a:off x="886968" y="4802631"/>
+            <a:off x="886968" y="4340351"/>
             <a:ext cx="155448" cy="155448"/>
           </a:xfrm>
           <a:prstGeom prst="ellipse">
@@ -16948,7 +17066,7 @@
         </p:nvSpPr>
         <p:spPr>
           <a:xfrm>
-            <a:off x="1252728" y="4663948"/>
+            <a:off x="1252728" y="4201668"/>
             <a:ext cx="5605272" cy="508000"/>
           </a:xfrm>
           <a:prstGeom prst="rect">
@@ -16990,7 +17108,7 @@
         <p:spPr>
           <a:xfrm>
             <a:off x="7269480" y="2193036"/>
-            <a:ext cx="4053809" cy="3613404"/>
+            <a:ext cx="4053809" cy="3078480"/>
           </a:xfrm>
           <a:prstGeom prst="rect">
             <a:avLst/>
@@ -17118,8 +17236,8 @@
         </p:nvSpPr>
         <p:spPr>
           <a:xfrm>
-            <a:off x="7562088" y="3253740"/>
-            <a:ext cx="3468593" cy="347472"/>
+            <a:off x="7562088" y="3198876"/>
+            <a:ext cx="3468593" cy="329184"/>
           </a:xfrm>
           <a:prstGeom prst="rect">
             <a:avLst/>
@@ -17159,8 +17277,8 @@
         </p:nvSpPr>
         <p:spPr>
           <a:xfrm>
-            <a:off x="7562088" y="3619500"/>
-            <a:ext cx="3468593" cy="512064"/>
+            <a:off x="7562088" y="3546348"/>
+            <a:ext cx="3468593" cy="493776"/>
           </a:xfrm>
           <a:prstGeom prst="rect">
             <a:avLst/>
@@ -17200,8 +17318,8 @@
         </p:nvSpPr>
         <p:spPr>
           <a:xfrm>
-            <a:off x="7562088" y="4314444"/>
-            <a:ext cx="3468593" cy="347472"/>
+            <a:off x="7562088" y="4212336"/>
+            <a:ext cx="3468593" cy="329184"/>
           </a:xfrm>
           <a:prstGeom prst="rect">
             <a:avLst/>
@@ -17241,8 +17359,8 @@
         </p:nvSpPr>
         <p:spPr>
           <a:xfrm>
-            <a:off x="7562088" y="4680204"/>
-            <a:ext cx="3468593" cy="512064"/>
+            <a:off x="7562088" y="4559808"/>
+            <a:ext cx="3468593" cy="493776"/>
           </a:xfrm>
           <a:prstGeom prst="rect">
             <a:avLst/>
@@ -17261,7 +17379,7 @@
               </a:lnSpc>
             </a:pPr>
             <a:r>
-              <a:rPr sz="3000" b="1" i="0">
+              <a:rPr sz="2200" b="1" i="0">
                 <a:solidFill>
                   <a:srgbClr val="B34A33"/>
                 </a:solidFill>
@@ -17269,7 +17387,7 @@
                 <a:ea typeface="Meiryo"/>
                 <a:cs typeface="Meiryo"/>
               </a:rPr>
-              <a:t>学科の全員</a:t>
+              <a:t>学科の全員（条件あり）</a:t>
             </a:r>
           </a:p>
         </p:txBody>
@@ -17277,6 +17395,47 @@
       <p:sp>
         <p:nvSpPr>
           <p:cNvPr id="19" name="TextBox 18"/>
+          <p:cNvSpPr txBox="1"/>
+          <p:nvPr/>
+        </p:nvSpPr>
+        <p:spPr>
+          <a:xfrm>
+            <a:off x="868680" y="5600700"/>
+            <a:ext cx="10454609" cy="342900"/>
+          </a:xfrm>
+          <a:prstGeom prst="rect">
+            <a:avLst/>
+          </a:prstGeom>
+          <a:noFill/>
+        </p:spPr>
+        <p:txBody>
+          <a:bodyPr wrap="square" lIns="0" rIns="0" tIns="0" bIns="0" anchor="t">
+            <a:spAutoFit/>
+          </a:bodyPr>
+          <a:lstStyle/>
+          <a:p>
+            <a:pPr algn="l">
+              <a:lnSpc>
+                <a:spcPct val="130000"/>
+              </a:lnSpc>
+            </a:pPr>
+            <a:r>
+              <a:rPr sz="1800" b="0" i="0">
+                <a:solidFill>
+                  <a:srgbClr val="41505F"/>
+                </a:solidFill>
+                <a:latin typeface="Meiryo"/>
+                <a:ea typeface="Meiryo"/>
+                <a:cs typeface="Meiryo"/>
+              </a:rPr>
+              <a:t>※検定料補助の支給条件は、最新の募集要項でご確認ください。</a:t>
+            </a:r>
+          </a:p>
+        </p:txBody>
+      </p:sp>
+      <p:sp>
+        <p:nvSpPr>
+          <p:cNvPr id="20" name="TextBox 19"/>
           <p:cNvSpPr txBox="1"/>
           <p:nvPr/>
         </p:nvSpPr>
@@ -17511,7 +17670,7 @@
         </p:nvSpPr>
         <p:spPr>
           <a:xfrm>
-            <a:off x="886968" y="2326386"/>
+            <a:off x="886968" y="2321052"/>
             <a:ext cx="155448" cy="155448"/>
           </a:xfrm>
           <a:prstGeom prst="ellipse">
@@ -17556,7 +17715,7 @@
         <p:spPr>
           <a:xfrm>
             <a:off x="1252728" y="2193036"/>
-            <a:ext cx="10070561" cy="490220"/>
+            <a:ext cx="10070561" cy="472439"/>
           </a:xfrm>
           <a:prstGeom prst="rect">
             <a:avLst/>
@@ -17575,7 +17734,7 @@
               </a:lnSpc>
             </a:pPr>
             <a:r>
-              <a:rPr sz="2500" b="0" i="0">
+              <a:rPr sz="2400" b="0" i="0">
                 <a:solidFill>
                   <a:srgbClr val="12253F"/>
                 </a:solidFill>
@@ -17596,7 +17755,7 @@
         </p:nvSpPr>
         <p:spPr>
           <a:xfrm>
-            <a:off x="886968" y="3045206"/>
+            <a:off x="886968" y="2912364"/>
             <a:ext cx="155448" cy="155448"/>
           </a:xfrm>
           <a:prstGeom prst="ellipse">
@@ -17640,8 +17799,8 @@
         </p:nvSpPr>
         <p:spPr>
           <a:xfrm>
-            <a:off x="1252728" y="2911856"/>
-            <a:ext cx="10070561" cy="490220"/>
+            <a:off x="1252728" y="2784348"/>
+            <a:ext cx="10070561" cy="472439"/>
           </a:xfrm>
           <a:prstGeom prst="rect">
             <a:avLst/>
@@ -17660,7 +17819,7 @@
               </a:lnSpc>
             </a:pPr>
             <a:r>
-              <a:rPr sz="2500" b="0" i="0">
+              <a:rPr sz="2400" b="0" i="0">
                 <a:solidFill>
                   <a:srgbClr val="12253F"/>
                 </a:solidFill>
@@ -17681,7 +17840,7 @@
         </p:nvSpPr>
         <p:spPr>
           <a:xfrm>
-            <a:off x="886968" y="3764025"/>
+            <a:off x="886968" y="3503676"/>
             <a:ext cx="155448" cy="155448"/>
           </a:xfrm>
           <a:prstGeom prst="ellipse">
@@ -17725,8 +17884,8 @@
         </p:nvSpPr>
         <p:spPr>
           <a:xfrm>
-            <a:off x="1252728" y="3630676"/>
-            <a:ext cx="10070561" cy="490220"/>
+            <a:off x="1252728" y="3375660"/>
+            <a:ext cx="10070561" cy="472439"/>
           </a:xfrm>
           <a:prstGeom prst="rect">
             <a:avLst/>
@@ -17745,7 +17904,7 @@
               </a:lnSpc>
             </a:pPr>
             <a:r>
-              <a:rPr sz="2500" b="0" i="0">
+              <a:rPr sz="2400" b="0" i="0">
                 <a:solidFill>
                   <a:srgbClr val="12253F"/>
                 </a:solidFill>
@@ -17753,7 +17912,7 @@
                 <a:ea typeface="Meiryo"/>
                 <a:cs typeface="Meiryo"/>
               </a:rPr>
-              <a:t>優遇：入学後の授業料を 半額免除</a:t>
+              <a:t>優遇：授業料を 半額免除</a:t>
             </a:r>
           </a:p>
         </p:txBody>
@@ -17766,7 +17925,7 @@
         </p:nvSpPr>
         <p:spPr>
           <a:xfrm>
-            <a:off x="868680" y="4242816"/>
+            <a:off x="868680" y="3945635"/>
             <a:ext cx="10454609" cy="786384"/>
           </a:xfrm>
           <a:prstGeom prst="rect">
@@ -17810,7 +17969,7 @@
         </p:nvSpPr>
         <p:spPr>
           <a:xfrm>
-            <a:off x="868680" y="4242816"/>
+            <a:off x="868680" y="3945635"/>
             <a:ext cx="100584" cy="786384"/>
           </a:xfrm>
           <a:prstGeom prst="rect">
@@ -17854,7 +18013,7 @@
         </p:nvSpPr>
         <p:spPr>
           <a:xfrm>
-            <a:off x="1197864" y="4370831"/>
+            <a:off x="1197864" y="4073651"/>
             <a:ext cx="9814529" cy="548640"/>
           </a:xfrm>
           <a:prstGeom prst="rect">
@@ -17895,8 +18054,8 @@
         </p:nvSpPr>
         <p:spPr>
           <a:xfrm>
-            <a:off x="868680" y="5303520"/>
-            <a:ext cx="10454609" cy="640080"/>
+            <a:off x="868680" y="5006340"/>
+            <a:ext cx="10454609" cy="937260"/>
           </a:xfrm>
           <a:prstGeom prst="rect">
             <a:avLst/>
@@ -17923,7 +18082,7 @@
                 <a:ea typeface="Meiryo"/>
                 <a:cs typeface="Meiryo"/>
               </a:rPr>
-              <a:t>※入試制度・免除の内容は変更される場合があります。最新の入学者選抜要項を必ずご確認ください。</a:t>
+              <a:t>※指定校推薦入試のため、在籍校が対象校である必要があります。免除の対象年次・継続条件を含め、制度内容は変更される場合があります。最新の入学者選抜要項を必ずご確認ください。</a:t>
             </a:r>
           </a:p>
         </p:txBody>
@@ -18166,7 +18325,7 @@
         <p:spPr>
           <a:xfrm>
             <a:off x="868680" y="2193036"/>
-            <a:ext cx="10454609" cy="841248"/>
+            <a:ext cx="10454609" cy="762507"/>
           </a:xfrm>
           <a:prstGeom prst="rect">
             <a:avLst/>
@@ -18210,7 +18369,7 @@
         <p:spPr>
           <a:xfrm>
             <a:off x="868680" y="2193036"/>
-            <a:ext cx="100584" cy="841248"/>
+            <a:ext cx="100584" cy="762507"/>
           </a:xfrm>
           <a:prstGeom prst="rect">
             <a:avLst/>
@@ -18253,8 +18412,8 @@
         </p:nvSpPr>
         <p:spPr>
           <a:xfrm>
-            <a:off x="1252728" y="2249170"/>
-            <a:ext cx="822960" cy="728980"/>
+            <a:off x="1252728" y="2245360"/>
+            <a:ext cx="822960" cy="657859"/>
           </a:xfrm>
           <a:prstGeom prst="rect">
             <a:avLst/>
@@ -18273,7 +18432,7 @@
               </a:lnSpc>
             </a:pPr>
             <a:r>
-              <a:rPr sz="4100" b="1" i="0">
+              <a:rPr sz="3700" b="1" i="0">
                 <a:solidFill>
                   <a:srgbClr val="0B4C9E"/>
                 </a:solidFill>
@@ -18295,7 +18454,7 @@
         <p:spPr>
           <a:xfrm>
             <a:off x="2240280" y="2339340"/>
-            <a:ext cx="8625809" cy="548640"/>
+            <a:ext cx="8625809" cy="469899"/>
           </a:xfrm>
           <a:prstGeom prst="rect">
             <a:avLst/>
@@ -18335,8 +18494,8 @@
         </p:nvSpPr>
         <p:spPr>
           <a:xfrm>
-            <a:off x="868680" y="3253740"/>
-            <a:ext cx="10454609" cy="841248"/>
+            <a:off x="868680" y="3156712"/>
+            <a:ext cx="10454609" cy="762507"/>
           </a:xfrm>
           <a:prstGeom prst="rect">
             <a:avLst/>
@@ -18379,8 +18538,8 @@
         </p:nvSpPr>
         <p:spPr>
           <a:xfrm>
-            <a:off x="868680" y="3253740"/>
-            <a:ext cx="100584" cy="841248"/>
+            <a:off x="868680" y="3156712"/>
+            <a:ext cx="100584" cy="762507"/>
           </a:xfrm>
           <a:prstGeom prst="rect">
             <a:avLst/>
@@ -18423,8 +18582,8 @@
         </p:nvSpPr>
         <p:spPr>
           <a:xfrm>
-            <a:off x="1252728" y="3309874"/>
-            <a:ext cx="822960" cy="728980"/>
+            <a:off x="1252728" y="3209036"/>
+            <a:ext cx="822960" cy="657859"/>
           </a:xfrm>
           <a:prstGeom prst="rect">
             <a:avLst/>
@@ -18443,7 +18602,7 @@
               </a:lnSpc>
             </a:pPr>
             <a:r>
-              <a:rPr sz="4100" b="1" i="0">
+              <a:rPr sz="3700" b="1" i="0">
                 <a:solidFill>
                   <a:srgbClr val="0A6156"/>
                 </a:solidFill>
@@ -18464,8 +18623,8 @@
         </p:nvSpPr>
         <p:spPr>
           <a:xfrm>
-            <a:off x="2240280" y="3400044"/>
-            <a:ext cx="8625809" cy="548640"/>
+            <a:off x="2240280" y="3303016"/>
+            <a:ext cx="8625809" cy="469899"/>
           </a:xfrm>
           <a:prstGeom prst="rect">
             <a:avLst/>
@@ -18505,8 +18664,8 @@
         </p:nvSpPr>
         <p:spPr>
           <a:xfrm>
-            <a:off x="868680" y="4314444"/>
-            <a:ext cx="10454609" cy="841248"/>
+            <a:off x="868680" y="4120388"/>
+            <a:ext cx="10454609" cy="762507"/>
           </a:xfrm>
           <a:prstGeom prst="rect">
             <a:avLst/>
@@ -18549,14 +18708,14 @@
         </p:nvSpPr>
         <p:spPr>
           <a:xfrm>
-            <a:off x="868680" y="4314444"/>
-            <a:ext cx="100584" cy="841248"/>
+            <a:off x="868680" y="4120388"/>
+            <a:ext cx="100584" cy="762507"/>
           </a:xfrm>
           <a:prstGeom prst="rect">
             <a:avLst/>
           </a:prstGeom>
           <a:solidFill>
-            <a:srgbClr val="F2B01E"/>
+            <a:srgbClr val="B34A33"/>
           </a:solidFill>
           <a:ln>
             <a:noFill/>
@@ -18593,8 +18752,8 @@
         </p:nvSpPr>
         <p:spPr>
           <a:xfrm>
-            <a:off x="1252728" y="4370578"/>
-            <a:ext cx="822960" cy="728980"/>
+            <a:off x="1252728" y="4172712"/>
+            <a:ext cx="822960" cy="657859"/>
           </a:xfrm>
           <a:prstGeom prst="rect">
             <a:avLst/>
@@ -18613,9 +18772,9 @@
               </a:lnSpc>
             </a:pPr>
             <a:r>
-              <a:rPr sz="4100" b="1" i="0">
-                <a:solidFill>
-                  <a:srgbClr val="5C4204"/>
+              <a:rPr sz="3700" b="1" i="0">
+                <a:solidFill>
+                  <a:srgbClr val="B34A33"/>
                 </a:solidFill>
                 <a:latin typeface="Meiryo"/>
                 <a:ea typeface="Meiryo"/>
@@ -18634,8 +18793,8 @@
         </p:nvSpPr>
         <p:spPr>
           <a:xfrm>
-            <a:off x="2240280" y="4460748"/>
-            <a:ext cx="8625809" cy="548640"/>
+            <a:off x="2240280" y="4266692"/>
+            <a:ext cx="8625809" cy="469899"/>
           </a:xfrm>
           <a:prstGeom prst="rect">
             <a:avLst/>
@@ -19123,7 +19282,7 @@
                 <a:ea typeface="Meiryo"/>
                 <a:cs typeface="Meiryo"/>
               </a:rPr>
-              <a:t>個別相談ブースで、いつでも質問を受けます</a:t>
+              <a:t>質問は、この場でも、このあとでも歓迎です</a:t>
             </a:r>
           </a:p>
         </p:txBody>
@@ -19349,7 +19508,7 @@
                 <a:ea typeface="Meiryo"/>
                 <a:cs typeface="Meiryo"/>
               </a:rPr>
-              <a:t>今日話すこと（20分）</a:t>
+              <a:t>今日話すこと</a:t>
             </a:r>
           </a:p>
         </p:txBody>
@@ -19407,7 +19566,7 @@
         <p:spPr>
           <a:xfrm>
             <a:off x="868680" y="2193036"/>
-            <a:ext cx="10454609" cy="786384"/>
+            <a:ext cx="10454609" cy="750315"/>
           </a:xfrm>
           <a:prstGeom prst="rect">
             <a:avLst/>
@@ -19451,7 +19610,7 @@
         <p:spPr>
           <a:xfrm>
             <a:off x="868680" y="2193036"/>
-            <a:ext cx="100584" cy="786384"/>
+            <a:ext cx="100584" cy="750315"/>
           </a:xfrm>
           <a:prstGeom prst="rect">
             <a:avLst/>
@@ -19495,7 +19654,7 @@
         <p:spPr>
           <a:xfrm>
             <a:off x="1252728" y="2348484"/>
-            <a:ext cx="475488" cy="475488"/>
+            <a:ext cx="439419" cy="439419"/>
           </a:xfrm>
           <a:prstGeom prst="ellipse">
             <a:avLst/>
@@ -19538,8 +19697,8 @@
         </p:nvSpPr>
         <p:spPr>
           <a:xfrm>
-            <a:off x="1252728" y="2419807"/>
-            <a:ext cx="475488" cy="351861"/>
+            <a:off x="1252728" y="2414397"/>
+            <a:ext cx="439419" cy="325170"/>
           </a:xfrm>
           <a:prstGeom prst="rect">
             <a:avLst/>
@@ -19580,7 +19739,7 @@
         <p:spPr>
           <a:xfrm>
             <a:off x="2258568" y="2339340"/>
-            <a:ext cx="8607521" cy="493776"/>
+            <a:ext cx="8607521" cy="457707"/>
           </a:xfrm>
           <a:prstGeom prst="rect">
             <a:avLst/>
@@ -19620,8 +19779,8 @@
         </p:nvSpPr>
         <p:spPr>
           <a:xfrm>
-            <a:off x="868680" y="3217164"/>
-            <a:ext cx="10454609" cy="786384"/>
+            <a:off x="868680" y="3162808"/>
+            <a:ext cx="10454609" cy="750315"/>
           </a:xfrm>
           <a:prstGeom prst="rect">
             <a:avLst/>
@@ -19664,8 +19823,8 @@
         </p:nvSpPr>
         <p:spPr>
           <a:xfrm>
-            <a:off x="868680" y="3217164"/>
-            <a:ext cx="100584" cy="786384"/>
+            <a:off x="868680" y="3162808"/>
+            <a:ext cx="100584" cy="750315"/>
           </a:xfrm>
           <a:prstGeom prst="rect">
             <a:avLst/>
@@ -19708,8 +19867,8 @@
         </p:nvSpPr>
         <p:spPr>
           <a:xfrm>
-            <a:off x="1252728" y="3372612"/>
-            <a:ext cx="475488" cy="475488"/>
+            <a:off x="1252728" y="3318255"/>
+            <a:ext cx="439419" cy="439419"/>
           </a:xfrm>
           <a:prstGeom prst="ellipse">
             <a:avLst/>
@@ -19752,8 +19911,8 @@
         </p:nvSpPr>
         <p:spPr>
           <a:xfrm>
-            <a:off x="1252728" y="3443935"/>
-            <a:ext cx="475488" cy="351861"/>
+            <a:off x="1252728" y="3384169"/>
+            <a:ext cx="439419" cy="325170"/>
           </a:xfrm>
           <a:prstGeom prst="rect">
             <a:avLst/>
@@ -19793,8 +19952,8 @@
         </p:nvSpPr>
         <p:spPr>
           <a:xfrm>
-            <a:off x="2258568" y="3363468"/>
-            <a:ext cx="8607521" cy="493776"/>
+            <a:off x="2258568" y="3309112"/>
+            <a:ext cx="8607521" cy="457707"/>
           </a:xfrm>
           <a:prstGeom prst="rect">
             <a:avLst/>
@@ -19834,8 +19993,8 @@
         </p:nvSpPr>
         <p:spPr>
           <a:xfrm>
-            <a:off x="868680" y="4241292"/>
-            <a:ext cx="10454609" cy="786384"/>
+            <a:off x="868680" y="4132579"/>
+            <a:ext cx="10454609" cy="750315"/>
           </a:xfrm>
           <a:prstGeom prst="rect">
             <a:avLst/>
@@ -19878,8 +20037,8 @@
         </p:nvSpPr>
         <p:spPr>
           <a:xfrm>
-            <a:off x="868680" y="4241292"/>
-            <a:ext cx="100584" cy="786384"/>
+            <a:off x="868680" y="4132579"/>
+            <a:ext cx="100584" cy="750315"/>
           </a:xfrm>
           <a:prstGeom prst="rect">
             <a:avLst/>
@@ -19922,8 +20081,8 @@
         </p:nvSpPr>
         <p:spPr>
           <a:xfrm>
-            <a:off x="1252728" y="4396740"/>
-            <a:ext cx="475488" cy="475488"/>
+            <a:off x="1252728" y="4288027"/>
+            <a:ext cx="439419" cy="439419"/>
           </a:xfrm>
           <a:prstGeom prst="ellipse">
             <a:avLst/>
@@ -19966,8 +20125,8 @@
         </p:nvSpPr>
         <p:spPr>
           <a:xfrm>
-            <a:off x="1252728" y="4468063"/>
-            <a:ext cx="475488" cy="351861"/>
+            <a:off x="1252728" y="4353941"/>
+            <a:ext cx="439419" cy="325170"/>
           </a:xfrm>
           <a:prstGeom prst="rect">
             <a:avLst/>
@@ -20007,8 +20166,8 @@
         </p:nvSpPr>
         <p:spPr>
           <a:xfrm>
-            <a:off x="2258568" y="4387596"/>
-            <a:ext cx="8607521" cy="493776"/>
+            <a:off x="2258568" y="4278884"/>
+            <a:ext cx="8607521" cy="457707"/>
           </a:xfrm>
           <a:prstGeom prst="rect">
             <a:avLst/>
@@ -20349,7 +20508,7 @@
                 <a:ea typeface="Meiryo"/>
                 <a:cs typeface="Meiryo"/>
               </a:rPr>
-              <a:t>鈴木 伸（すずき しん）講師</a:t>
+              <a:t>鈴木 伸 講師</a:t>
             </a:r>
           </a:p>
         </p:txBody>
@@ -20535,8 +20694,8 @@
         </p:nvSpPr>
         <p:spPr>
           <a:xfrm>
-            <a:off x="7976585" y="2130552"/>
-            <a:ext cx="3035808" cy="310896"/>
+            <a:off x="7976585" y="2112263"/>
+            <a:ext cx="3035808" cy="672084"/>
           </a:xfrm>
           <a:prstGeom prst="rect">
             <a:avLst/>
@@ -20555,63 +20714,22 @@
               </a:lnSpc>
             </a:pPr>
             <a:r>
-              <a:rPr sz="1800" b="1" i="0">
-                <a:solidFill>
-                  <a:srgbClr val="41505F"/>
+              <a:rPr sz="1200" b="0" i="0">
+                <a:solidFill>
+                  <a:srgbClr val="9BABBC"/>
                 </a:solidFill>
                 <a:latin typeface="Meiryo"/>
                 <a:ea typeface="Meiryo"/>
                 <a:cs typeface="Meiryo"/>
               </a:rPr>
-              <a:t>［写真を差し込む位置］</a:t>
-            </a:r>
-          </a:p>
-        </p:txBody>
-      </p:sp>
-      <p:sp>
-        <p:nvSpPr>
-          <p:cNvPr id="10" name="TextBox 9"/>
-          <p:cNvSpPr txBox="1"/>
-          <p:nvPr/>
-        </p:nvSpPr>
-        <p:spPr>
-          <a:xfrm>
-            <a:off x="7976585" y="2514600"/>
-            <a:ext cx="3035808" cy="583184"/>
-          </a:xfrm>
-          <a:prstGeom prst="rect">
-            <a:avLst/>
-          </a:prstGeom>
-          <a:noFill/>
-        </p:spPr>
-        <p:txBody>
-          <a:bodyPr wrap="square" lIns="0" rIns="0" tIns="0" bIns="0" anchor="t">
-            <a:spAutoFit/>
-          </a:bodyPr>
-          <a:lstStyle/>
-          <a:p>
-            <a:pPr algn="l">
-              <a:lnSpc>
-                <a:spcPct val="130000"/>
-              </a:lnSpc>
-            </a:pPr>
-            <a:r>
-              <a:rPr sz="1600" b="0" i="0">
-                <a:solidFill>
-                  <a:srgbClr val="41505F"/>
-                </a:solidFill>
-                <a:latin typeface="Meiryo"/>
-                <a:ea typeface="Meiryo"/>
-                <a:cs typeface="Meiryo"/>
-              </a:rPr>
-              <a:t>研究室の写真（EUの傘・フィンランド国旗）をここに配置</a:t>
-            </a:r>
-          </a:p>
-        </p:txBody>
-      </p:sp>
-      <p:sp>
-        <p:nvSpPr>
-          <p:cNvPr id="11" name="Oval 10"/>
+              <a:t>［写真を差し込む位置］　研究室の写真（EUの傘・フィンランド国旗）をここに配置</a:t>
+            </a:r>
+          </a:p>
+        </p:txBody>
+      </p:sp>
+      <p:sp>
+        <p:nvSpPr>
+          <p:cNvPr id="10" name="Oval 9"/>
           <p:cNvSpPr/>
           <p:nvPr/>
         </p:nvSpPr>
@@ -20655,7 +20773,7 @@
       </p:sp>
       <p:sp>
         <p:nvSpPr>
-          <p:cNvPr id="12" name="TextBox 11"/>
+          <p:cNvPr id="11" name="TextBox 10"/>
           <p:cNvSpPr txBox="1"/>
           <p:nvPr/>
         </p:nvSpPr>
@@ -20696,7 +20814,7 @@
       </p:sp>
       <p:sp>
         <p:nvSpPr>
-          <p:cNvPr id="13" name="Oval 12"/>
+          <p:cNvPr id="12" name="Oval 11"/>
           <p:cNvSpPr/>
           <p:nvPr/>
         </p:nvSpPr>
@@ -20740,7 +20858,7 @@
       </p:sp>
       <p:sp>
         <p:nvSpPr>
-          <p:cNvPr id="14" name="TextBox 13"/>
+          <p:cNvPr id="13" name="TextBox 12"/>
           <p:cNvSpPr txBox="1"/>
           <p:nvPr/>
         </p:nvSpPr>
@@ -20781,7 +20899,7 @@
       </p:sp>
       <p:sp>
         <p:nvSpPr>
-          <p:cNvPr id="15" name="Oval 14"/>
+          <p:cNvPr id="14" name="Oval 13"/>
           <p:cNvSpPr/>
           <p:nvPr/>
         </p:nvSpPr>
@@ -20825,7 +20943,7 @@
       </p:sp>
       <p:sp>
         <p:nvSpPr>
-          <p:cNvPr id="16" name="TextBox 15"/>
+          <p:cNvPr id="15" name="TextBox 14"/>
           <p:cNvSpPr txBox="1"/>
           <p:nvPr/>
         </p:nvSpPr>
@@ -20866,7 +20984,7 @@
       </p:sp>
       <p:sp>
         <p:nvSpPr>
-          <p:cNvPr id="17" name="Rectangle 16"/>
+          <p:cNvPr id="16" name="Rectangle 15"/>
           <p:cNvSpPr/>
           <p:nvPr/>
         </p:nvSpPr>
@@ -20910,7 +21028,7 @@
       </p:sp>
       <p:sp>
         <p:nvSpPr>
-          <p:cNvPr id="18" name="Rectangle 17"/>
+          <p:cNvPr id="17" name="Rectangle 16"/>
           <p:cNvSpPr/>
           <p:nvPr/>
         </p:nvSpPr>
@@ -20954,7 +21072,7 @@
       </p:sp>
       <p:sp>
         <p:nvSpPr>
-          <p:cNvPr id="19" name="TextBox 18"/>
+          <p:cNvPr id="18" name="TextBox 17"/>
           <p:cNvSpPr txBox="1"/>
           <p:nvPr/>
         </p:nvSpPr>
@@ -20995,7 +21113,7 @@
       </p:sp>
       <p:sp>
         <p:nvSpPr>
-          <p:cNvPr id="20" name="TextBox 19"/>
+          <p:cNvPr id="19" name="TextBox 18"/>
           <p:cNvSpPr txBox="1"/>
           <p:nvPr/>
         </p:nvSpPr>
@@ -23341,7 +23459,7 @@
         <p:spPr>
           <a:xfrm>
             <a:off x="1179576" y="3015996"/>
-            <a:ext cx="2680197" cy="521970"/>
+            <a:ext cx="2680197" cy="426719"/>
           </a:xfrm>
           <a:prstGeom prst="rect">
             <a:avLst/>
@@ -23360,7 +23478,7 @@
               </a:lnSpc>
             </a:pPr>
             <a:r>
-              <a:rPr sz="3000" b="1" i="0">
+              <a:rPr sz="2400" b="1" i="0">
                 <a:solidFill>
                   <a:srgbClr val="12253F"/>
                 </a:solidFill>
@@ -23381,8 +23499,8 @@
         </p:nvSpPr>
         <p:spPr>
           <a:xfrm>
-            <a:off x="1179576" y="3784854"/>
-            <a:ext cx="2680197" cy="1838706"/>
+            <a:off x="1179576" y="3689604"/>
+            <a:ext cx="2680197" cy="1933956"/>
           </a:xfrm>
           <a:prstGeom prst="rect">
             <a:avLst/>
@@ -23620,7 +23738,7 @@
                 <a:ea typeface="Meiryo"/>
                 <a:cs typeface="Meiryo"/>
               </a:rPr>
-              <a:t>英語と中国語を、毎日「トレーニング」。</a:t>
+              <a:t>英語と中国語を、毎日つかって覚えます。</a:t>
             </a:r>
           </a:p>
         </p:txBody>
@@ -23763,7 +23881,7 @@
         <p:spPr>
           <a:xfrm>
             <a:off x="8332195" y="3015996"/>
-            <a:ext cx="2680197" cy="474345"/>
+            <a:ext cx="2680197" cy="426719"/>
           </a:xfrm>
           <a:prstGeom prst="rect">
             <a:avLst/>
@@ -23782,7 +23900,7 @@
               </a:lnSpc>
             </a:pPr>
             <a:r>
-              <a:rPr sz="2700" b="1" i="0">
+              <a:rPr sz="2400" b="1" i="0">
                 <a:solidFill>
                   <a:srgbClr val="12253F"/>
                 </a:solidFill>
@@ -23803,8 +23921,8 @@
         </p:nvSpPr>
         <p:spPr>
           <a:xfrm>
-            <a:off x="8332195" y="3737229"/>
-            <a:ext cx="2680197" cy="1886331"/>
+            <a:off x="8332195" y="3689604"/>
+            <a:ext cx="2680197" cy="1933956"/>
           </a:xfrm>
           <a:prstGeom prst="rect">
             <a:avLst/>
@@ -24074,7 +24192,7 @@
         <p:spPr>
           <a:xfrm>
             <a:off x="868680" y="2238756"/>
-            <a:ext cx="4800600" cy="2827020"/>
+            <a:ext cx="4800600" cy="3124200"/>
           </a:xfrm>
           <a:prstGeom prst="rect">
             <a:avLst/>
@@ -24117,8 +24235,8 @@
         </p:nvSpPr>
         <p:spPr>
           <a:xfrm>
-            <a:off x="868680" y="2424683"/>
-            <a:ext cx="4800600" cy="1476248"/>
+            <a:off x="868680" y="2425954"/>
+            <a:ext cx="4800600" cy="1770887"/>
           </a:xfrm>
           <a:prstGeom prst="rect">
             <a:avLst/>
@@ -24137,7 +24255,7 @@
               </a:lnSpc>
             </a:pPr>
             <a:r>
-              <a:rPr sz="9400" b="1" i="0">
+              <a:rPr sz="11400" b="1" i="0">
                 <a:solidFill>
                   <a:srgbClr val="1160C4"/>
                 </a:solidFill>
@@ -24158,7 +24276,7 @@
         </p:nvSpPr>
         <p:spPr>
           <a:xfrm>
-            <a:off x="1143000" y="4068572"/>
+            <a:off x="1143000" y="4365752"/>
             <a:ext cx="4251960" cy="832611"/>
           </a:xfrm>
           <a:prstGeom prst="rect">
@@ -24459,7 +24577,7 @@
                 <a:ea typeface="Meiryo"/>
                 <a:cs typeface="Meiryo"/>
               </a:rPr>
-              <a:t>英語／中国語／韓国語／スペイン語</a:t>
+              <a:t>英語・中国語・韓国語・スペイン語</a:t>
             </a:r>
           </a:p>
         </p:txBody>
@@ -24472,8 +24590,8 @@
         </p:nvSpPr>
         <p:spPr>
           <a:xfrm>
-            <a:off x="868680" y="5303520"/>
-            <a:ext cx="10454609" cy="640080"/>
+            <a:off x="868680" y="5600700"/>
+            <a:ext cx="10454609" cy="342900"/>
           </a:xfrm>
           <a:prstGeom prst="rect">
             <a:avLst/>
@@ -24500,7 +24618,7 @@
                 <a:ea typeface="Meiryo"/>
                 <a:cs typeface="Meiryo"/>
               </a:rPr>
-              <a:t>上記の機関での勤務経験を持つ教員がいます。氏名と専門分野は配布のチラシに掲載（2026年8月時点）。</a:t>
+              <a:t>上記の機関での勤務経験を持つ教員が在籍しています（2026年8月時点）。</a:t>
             </a:r>
           </a:p>
         </p:txBody>
